--- a/CalendarioAgo26/presentaciones/11_FuncionesLambda.pptx
+++ b/CalendarioAgo26/presentaciones/11_FuncionesLambda.pptx
@@ -134,27 +134,35 @@
 </p:presentation>
 </file>
 
+<file path=ppt/revisionInfo.xml><?xml version="1.0" encoding="utf-8"?>
+<p1510:revInfo xmlns:a="http://schemas.openxmlformats.org/drawingml/2006/main" xmlns:r="http://schemas.openxmlformats.org/officeDocument/2006/relationships" xmlns:p1510="http://schemas.microsoft.com/office/powerpoint/2015/10/main">
+  <p1510:revLst>
+    <p1510:client id="{16215B2D-9907-469B-9919-45C52001E7E5}" v="1" dt="2026-08-11T16:38:46.141"/>
+  </p1510:revLst>
+</p1510:revInfo>
+</file>
+
 <file path=ppt/changesInfos/changesInfo1.xml><?xml version="1.0" encoding="utf-8"?>
 <pc:chgInfo xmlns:a="http://schemas.openxmlformats.org/drawingml/2006/main" xmlns:r="http://schemas.openxmlformats.org/officeDocument/2006/relationships" xmlns:ac="http://schemas.microsoft.com/office/drawing/2013/main/command" xmlns:pc="http://schemas.microsoft.com/office/powerpoint/2013/main/command">
   <pc:docChgLst>
-    <pc:chgData name="Lizethe Pérez Fuertes" userId="4ae9ef87-2a7d-42f8-8dfa-0a501a9e2ff4" providerId="ADAL" clId="{C56B9009-EB3A-4954-B31F-1F5A83417CF0}"/>
+    <pc:chgData name="Lizethe Pérez Fuertes" userId="4ae9ef87-2a7d-42f8-8dfa-0a501a9e2ff4" providerId="ADAL" clId="{FDDD45CB-1330-4033-A842-3D2746AFF7C7}"/>
     <pc:docChg chg="modSld">
-      <pc:chgData name="Lizethe Pérez Fuertes" userId="4ae9ef87-2a7d-42f8-8dfa-0a501a9e2ff4" providerId="ADAL" clId="{C56B9009-EB3A-4954-B31F-1F5A83417CF0}" dt="2025-08-26T22:39:11.032" v="0" actId="1076"/>
+      <pc:chgData name="Lizethe Pérez Fuertes" userId="4ae9ef87-2a7d-42f8-8dfa-0a501a9e2ff4" providerId="ADAL" clId="{FDDD45CB-1330-4033-A842-3D2746AFF7C7}" dt="2026-08-11T16:38:46.140" v="0"/>
       <pc:docMkLst>
         <pc:docMk/>
       </pc:docMkLst>
-      <pc:sldChg chg="modSp mod">
-        <pc:chgData name="Lizethe Pérez Fuertes" userId="4ae9ef87-2a7d-42f8-8dfa-0a501a9e2ff4" providerId="ADAL" clId="{C56B9009-EB3A-4954-B31F-1F5A83417CF0}" dt="2025-08-26T22:39:11.032" v="0" actId="1076"/>
+      <pc:sldChg chg="modSp">
+        <pc:chgData name="Lizethe Pérez Fuertes" userId="4ae9ef87-2a7d-42f8-8dfa-0a501a9e2ff4" providerId="ADAL" clId="{FDDD45CB-1330-4033-A842-3D2746AFF7C7}" dt="2026-08-11T16:38:46.140" v="0"/>
         <pc:sldMkLst>
           <pc:docMk/>
-          <pc:sldMk cId="1949121924" sldId="611"/>
+          <pc:sldMk cId="542782376" sldId="293"/>
         </pc:sldMkLst>
         <pc:spChg chg="mod">
-          <ac:chgData name="Lizethe Pérez Fuertes" userId="4ae9ef87-2a7d-42f8-8dfa-0a501a9e2ff4" providerId="ADAL" clId="{C56B9009-EB3A-4954-B31F-1F5A83417CF0}" dt="2025-08-26T22:39:11.032" v="0" actId="1076"/>
+          <ac:chgData name="Lizethe Pérez Fuertes" userId="4ae9ef87-2a7d-42f8-8dfa-0a501a9e2ff4" providerId="ADAL" clId="{FDDD45CB-1330-4033-A842-3D2746AFF7C7}" dt="2026-08-11T16:38:46.140" v="0"/>
           <ac:spMkLst>
             <pc:docMk/>
-            <pc:sldMk cId="1949121924" sldId="611"/>
-            <ac:spMk id="9" creationId="{66B9804B-D817-456E-BE4C-5F61511FF124}"/>
+            <pc:sldMk cId="542782376" sldId="293"/>
+            <ac:spMk id="2" creationId="{00000000-0000-0000-0000-000000000000}"/>
           </ac:spMkLst>
         </pc:spChg>
       </pc:sldChg>
@@ -245,7 +253,7 @@
           <a:p>
             <a:fld id="{DDE721D5-655F-45D2-B717-3C4CD78C8568}" type="datetimeFigureOut">
               <a:rPr lang="es-MX" smtClean="0"/>
-              <a:t>26/08/2025</a:t>
+              <a:t>11/08/2026</a:t>
             </a:fld>
             <a:endParaRPr lang="es-MX" dirty="0"/>
           </a:p>
@@ -1282,7 +1290,7 @@
           <a:p>
             <a:fld id="{B3F3E716-CACC-4490-AD07-F24B6A68DE47}" type="datetimeFigureOut">
               <a:rPr lang="es-MX" smtClean="0"/>
-              <a:t>26/08/2025</a:t>
+              <a:t>11/08/2026</a:t>
             </a:fld>
             <a:endParaRPr lang="es-MX" dirty="0"/>
           </a:p>
@@ -1452,7 +1460,7 @@
           <a:p>
             <a:fld id="{B3F3E716-CACC-4490-AD07-F24B6A68DE47}" type="datetimeFigureOut">
               <a:rPr lang="es-MX" smtClean="0"/>
-              <a:t>26/08/2025</a:t>
+              <a:t>11/08/2026</a:t>
             </a:fld>
             <a:endParaRPr lang="es-MX" dirty="0"/>
           </a:p>
@@ -1632,7 +1640,7 @@
           <a:p>
             <a:fld id="{B3F3E716-CACC-4490-AD07-F24B6A68DE47}" type="datetimeFigureOut">
               <a:rPr lang="es-MX" smtClean="0"/>
-              <a:t>26/08/2025</a:t>
+              <a:t>11/08/2026</a:t>
             </a:fld>
             <a:endParaRPr lang="es-MX" dirty="0"/>
           </a:p>
@@ -1785,7 +1793,7 @@
           <a:p>
             <a:fld id="{1D8BD707-D9CF-40AE-B4C6-C98DA3205C09}" type="datetimeFigureOut">
               <a:rPr lang="en-US" smtClean="0"/>
-              <a:t>8/26/2025</a:t>
+              <a:t>8/11/2026</a:t>
             </a:fld>
             <a:endParaRPr lang="en-US" dirty="0"/>
           </a:p>
@@ -1945,7 +1953,7 @@
           <a:p>
             <a:fld id="{B3F3E716-CACC-4490-AD07-F24B6A68DE47}" type="datetimeFigureOut">
               <a:rPr lang="es-MX" smtClean="0"/>
-              <a:t>26/08/2025</a:t>
+              <a:t>11/08/2026</a:t>
             </a:fld>
             <a:endParaRPr lang="es-MX" dirty="0"/>
           </a:p>
@@ -2191,7 +2199,7 @@
           <a:p>
             <a:fld id="{B3F3E716-CACC-4490-AD07-F24B6A68DE47}" type="datetimeFigureOut">
               <a:rPr lang="es-MX" smtClean="0"/>
-              <a:t>26/08/2025</a:t>
+              <a:t>11/08/2026</a:t>
             </a:fld>
             <a:endParaRPr lang="es-MX" dirty="0"/>
           </a:p>
@@ -2479,7 +2487,7 @@
           <a:p>
             <a:fld id="{B3F3E716-CACC-4490-AD07-F24B6A68DE47}" type="datetimeFigureOut">
               <a:rPr lang="es-MX" smtClean="0"/>
-              <a:t>26/08/2025</a:t>
+              <a:t>11/08/2026</a:t>
             </a:fld>
             <a:endParaRPr lang="es-MX" dirty="0"/>
           </a:p>
@@ -2901,7 +2909,7 @@
           <a:p>
             <a:fld id="{B3F3E716-CACC-4490-AD07-F24B6A68DE47}" type="datetimeFigureOut">
               <a:rPr lang="es-MX" smtClean="0"/>
-              <a:t>26/08/2025</a:t>
+              <a:t>11/08/2026</a:t>
             </a:fld>
             <a:endParaRPr lang="es-MX" dirty="0"/>
           </a:p>
@@ -3019,7 +3027,7 @@
           <a:p>
             <a:fld id="{B3F3E716-CACC-4490-AD07-F24B6A68DE47}" type="datetimeFigureOut">
               <a:rPr lang="es-MX" smtClean="0"/>
-              <a:t>26/08/2025</a:t>
+              <a:t>11/08/2026</a:t>
             </a:fld>
             <a:endParaRPr lang="es-MX" dirty="0"/>
           </a:p>
@@ -3114,7 +3122,7 @@
           <a:p>
             <a:fld id="{B3F3E716-CACC-4490-AD07-F24B6A68DE47}" type="datetimeFigureOut">
               <a:rPr lang="es-MX" smtClean="0"/>
-              <a:t>26/08/2025</a:t>
+              <a:t>11/08/2026</a:t>
             </a:fld>
             <a:endParaRPr lang="es-MX" dirty="0"/>
           </a:p>
@@ -3391,7 +3399,7 @@
           <a:p>
             <a:fld id="{B3F3E716-CACC-4490-AD07-F24B6A68DE47}" type="datetimeFigureOut">
               <a:rPr lang="es-MX" smtClean="0"/>
-              <a:t>26/08/2025</a:t>
+              <a:t>11/08/2026</a:t>
             </a:fld>
             <a:endParaRPr lang="es-MX" dirty="0"/>
           </a:p>
@@ -3644,7 +3652,7 @@
           <a:p>
             <a:fld id="{B3F3E716-CACC-4490-AD07-F24B6A68DE47}" type="datetimeFigureOut">
               <a:rPr lang="es-MX" smtClean="0"/>
-              <a:t>26/08/2025</a:t>
+              <a:t>11/08/2026</a:t>
             </a:fld>
             <a:endParaRPr lang="es-MX" dirty="0"/>
           </a:p>
@@ -3857,7 +3865,7 @@
           <a:p>
             <a:fld id="{B3F3E716-CACC-4490-AD07-F24B6A68DE47}" type="datetimeFigureOut">
               <a:rPr lang="es-MX" smtClean="0"/>
-              <a:t>26/08/2025</a:t>
+              <a:t>11/08/2026</a:t>
             </a:fld>
             <a:endParaRPr lang="es-MX" dirty="0"/>
           </a:p>
@@ -4255,21 +4263,18 @@
           </a:bodyPr>
           <a:lstStyle/>
           <a:p>
-            <a:pPr algn="l" eaLnBrk="1" fontAlgn="auto" hangingPunct="1">
-              <a:spcAft>
-                <a:spcPts val="0"/>
-              </a:spcAft>
+            <a:pPr algn="l">
               <a:defRPr/>
             </a:pPr>
             <a:r>
-              <a:rPr lang="es-MX" sz="3200" dirty="0">
+              <a:rPr lang="es-MX" sz="3200">
                 <a:solidFill>
                   <a:schemeClr val="bg2">
                     <a:lumMod val="50000"/>
                   </a:schemeClr>
                 </a:solidFill>
               </a:rPr>
-              <a:t>TI 3001 C</a:t>
+              <a:t>TI 3008 C</a:t>
             </a:r>
             <a:br>
               <a:rPr lang="es-MX" sz="3200" dirty="0">
